--- a/Nearer My God To Thee _CH.pptx
+++ b/Nearer My God To Thee _CH.pptx
@@ -263,7 +263,7 @@
           <a:p>
             <a:fld id="{E759A0DE-F190-5444-87AC-4719D5F20D15}" type="datetimeFigureOut">
               <a:rPr lang="en-US" smtClean="0"/>
-              <a:t>6/19/26</a:t>
+              <a:t>6/20/26</a:t>
             </a:fld>
             <a:endParaRPr lang="en-US"/>
           </a:p>
@@ -461,7 +461,7 @@
           <a:p>
             <a:fld id="{E759A0DE-F190-5444-87AC-4719D5F20D15}" type="datetimeFigureOut">
               <a:rPr lang="en-US" smtClean="0"/>
-              <a:t>6/19/26</a:t>
+              <a:t>6/20/26</a:t>
             </a:fld>
             <a:endParaRPr lang="en-US"/>
           </a:p>
@@ -669,7 +669,7 @@
           <a:p>
             <a:fld id="{E759A0DE-F190-5444-87AC-4719D5F20D15}" type="datetimeFigureOut">
               <a:rPr lang="en-US" smtClean="0"/>
-              <a:t>6/19/26</a:t>
+              <a:t>6/20/26</a:t>
             </a:fld>
             <a:endParaRPr lang="en-US"/>
           </a:p>
@@ -867,7 +867,7 @@
           <a:p>
             <a:fld id="{E759A0DE-F190-5444-87AC-4719D5F20D15}" type="datetimeFigureOut">
               <a:rPr lang="en-US" smtClean="0"/>
-              <a:t>6/19/26</a:t>
+              <a:t>6/20/26</a:t>
             </a:fld>
             <a:endParaRPr lang="en-US"/>
           </a:p>
@@ -1142,7 +1142,7 @@
           <a:p>
             <a:fld id="{E759A0DE-F190-5444-87AC-4719D5F20D15}" type="datetimeFigureOut">
               <a:rPr lang="en-US" smtClean="0"/>
-              <a:t>6/19/26</a:t>
+              <a:t>6/20/26</a:t>
             </a:fld>
             <a:endParaRPr lang="en-US"/>
           </a:p>
@@ -1407,7 +1407,7 @@
           <a:p>
             <a:fld id="{E759A0DE-F190-5444-87AC-4719D5F20D15}" type="datetimeFigureOut">
               <a:rPr lang="en-US" smtClean="0"/>
-              <a:t>6/19/26</a:t>
+              <a:t>6/20/26</a:t>
             </a:fld>
             <a:endParaRPr lang="en-US"/>
           </a:p>
@@ -1819,7 +1819,7 @@
           <a:p>
             <a:fld id="{E759A0DE-F190-5444-87AC-4719D5F20D15}" type="datetimeFigureOut">
               <a:rPr lang="en-US" smtClean="0"/>
-              <a:t>6/19/26</a:t>
+              <a:t>6/20/26</a:t>
             </a:fld>
             <a:endParaRPr lang="en-US"/>
           </a:p>
@@ -1960,7 +1960,7 @@
           <a:p>
             <a:fld id="{E759A0DE-F190-5444-87AC-4719D5F20D15}" type="datetimeFigureOut">
               <a:rPr lang="en-US" smtClean="0"/>
-              <a:t>6/19/26</a:t>
+              <a:t>6/20/26</a:t>
             </a:fld>
             <a:endParaRPr lang="en-US"/>
           </a:p>
@@ -2073,7 +2073,7 @@
           <a:p>
             <a:fld id="{E759A0DE-F190-5444-87AC-4719D5F20D15}" type="datetimeFigureOut">
               <a:rPr lang="en-US" smtClean="0"/>
-              <a:t>6/19/26</a:t>
+              <a:t>6/20/26</a:t>
             </a:fld>
             <a:endParaRPr lang="en-US"/>
           </a:p>
@@ -2384,7 +2384,7 @@
           <a:p>
             <a:fld id="{E759A0DE-F190-5444-87AC-4719D5F20D15}" type="datetimeFigureOut">
               <a:rPr lang="en-US" smtClean="0"/>
-              <a:t>6/19/26</a:t>
+              <a:t>6/20/26</a:t>
             </a:fld>
             <a:endParaRPr lang="en-US"/>
           </a:p>
@@ -2672,7 +2672,7 @@
           <a:p>
             <a:fld id="{E759A0DE-F190-5444-87AC-4719D5F20D15}" type="datetimeFigureOut">
               <a:rPr lang="en-US" smtClean="0"/>
-              <a:t>6/19/26</a:t>
+              <a:t>6/20/26</a:t>
             </a:fld>
             <a:endParaRPr lang="en-US"/>
           </a:p>
@@ -2913,7 +2913,7 @@
           <a:p>
             <a:fld id="{E759A0DE-F190-5444-87AC-4719D5F20D15}" type="datetimeFigureOut">
               <a:rPr lang="en-US" smtClean="0"/>
-              <a:t>6/19/26</a:t>
+              <a:t>6/20/26</a:t>
             </a:fld>
             <a:endParaRPr lang="en-US"/>
           </a:p>
@@ -4465,8 +4465,8 @@
         </p:nvSpPr>
         <p:spPr>
           <a:xfrm>
-            <a:off x="175846" y="152399"/>
-            <a:ext cx="11828585" cy="6541477"/>
+            <a:off x="175847" y="152399"/>
+            <a:ext cx="9472246" cy="6541477"/>
           </a:xfrm>
         </p:spPr>
         <p:txBody>
@@ -4586,6 +4586,45 @@
                 <a:ea typeface="Bodoni Ornaments" pitchFamily="2" charset="0"/>
               </a:rPr>
               <a:t>Nearer my God to Thee, nearer to Thee</a:t>
+            </a:r>
+          </a:p>
+        </p:txBody>
+      </p:sp>
+      <p:sp>
+        <p:nvSpPr>
+          <p:cNvPr id="2" name="TextBox 1">
+            <a:extLst>
+              <a:ext uri="{FF2B5EF4-FFF2-40B4-BE49-F238E27FC236}">
+                <a16:creationId xmlns:a16="http://schemas.microsoft.com/office/drawing/2014/main" id="{F00D4802-012D-522A-2FE6-F164512222F6}"/>
+              </a:ext>
+            </a:extLst>
+          </p:cNvPr>
+          <p:cNvSpPr txBox="1"/>
+          <p:nvPr/>
+        </p:nvSpPr>
+        <p:spPr>
+          <a:xfrm>
+            <a:off x="10890739" y="6273225"/>
+            <a:ext cx="1007007" cy="584775"/>
+          </a:xfrm>
+          <a:prstGeom prst="rect">
+            <a:avLst/>
+          </a:prstGeom>
+          <a:noFill/>
+        </p:spPr>
+        <p:txBody>
+          <a:bodyPr wrap="none" rtlCol="0">
+            <a:spAutoFit/>
+          </a:bodyPr>
+          <a:lstStyle/>
+          <a:p>
+            <a:r>
+              <a:rPr lang="en-US" sz="3200" b="1" dirty="0">
+                <a:solidFill>
+                  <a:srgbClr val="FFFF00"/>
+                </a:solidFill>
+              </a:rPr>
+              <a:t>END</a:t>
             </a:r>
           </a:p>
         </p:txBody>
